--- a/curriculum/M01/W01/L01/slides.pptx
+++ b/curriculum/M01/W01/L01/slides.pptx
@@ -7463,11 +7463,40 @@
                 <a:ea typeface="Malgun Gothic"/>
                 <a:cs typeface="Malgun Gothic"/>
               </a:rPr>
-              <a:t>: 우심방의 위쪽 벽에 있다. 분당 60~100회의 빈도로 가장 빠르게 흥분하므로 심장의 박동 속도를 결정한다. 이 때문에 정상 pacemaker라 부른다. 2. </a:t>
-            </a:r>
+              <a:t>: 우심방의 위쪽 벽에 있다. 분당 60~100회의 빈도로 가장 빠르게 흥분하므로 심장의 박동 속도를 결정한다. 이 때문에 정상 pacemaker라 부른다.</a:t>
+            </a:r>
+          </a:p>
+          <a:p>
+            <a:pPr>
+              <a:spcAft>
+                <a:spcPts val="900"/>
+              </a:spcAft>
+            </a:pPr>
             <a:r>
               <a:rPr sz="1400" b="1" i="0">
                 <a:solidFill>
+                  <a:srgbClr val="F2B705"/>
+                </a:solidFill>
+                <a:latin typeface="Malgun Gothic"/>
+                <a:ea typeface="Malgun Gothic"/>
+                <a:cs typeface="Malgun Gothic"/>
+              </a:rPr>
+              <a:t>•  </a:t>
+            </a:r>
+            <a:r>
+              <a:rPr sz="1400" b="0" i="0">
+                <a:solidFill>
+                  <a:srgbClr val="11202B"/>
+                </a:solidFill>
+                <a:latin typeface="Malgun Gothic"/>
+                <a:ea typeface="Malgun Gothic"/>
+                <a:cs typeface="Malgun Gothic"/>
+              </a:rPr>
+              <a:t>2. </a:t>
+            </a:r>
+            <a:r>
+              <a:rPr sz="1400" b="1" i="0">
+                <a:solidFill>
                   <a:srgbClr val="11202B"/>
                 </a:solidFill>
                 <a:latin typeface="Malgun Gothic"/>
@@ -7485,11 +7514,40 @@
                 <a:ea typeface="Malgun Gothic"/>
                 <a:cs typeface="Malgun Gothic"/>
               </a:rPr>
-              <a:t>: SA node의 흥분이 심방 전체로 퍼져 심방이 수축한다. 3. </a:t>
-            </a:r>
+              <a:t>: SA node의 흥분이 심방 전체로 퍼져 심방이 수축한다.</a:t>
+            </a:r>
+          </a:p>
+          <a:p>
+            <a:pPr>
+              <a:spcAft>
+                <a:spcPts val="900"/>
+              </a:spcAft>
+            </a:pPr>
             <a:r>
               <a:rPr sz="1400" b="1" i="0">
                 <a:solidFill>
+                  <a:srgbClr val="F2B705"/>
+                </a:solidFill>
+                <a:latin typeface="Malgun Gothic"/>
+                <a:ea typeface="Malgun Gothic"/>
+                <a:cs typeface="Malgun Gothic"/>
+              </a:rPr>
+              <a:t>•  </a:t>
+            </a:r>
+            <a:r>
+              <a:rPr sz="1400" b="0" i="0">
+                <a:solidFill>
+                  <a:srgbClr val="11202B"/>
+                </a:solidFill>
+                <a:latin typeface="Malgun Gothic"/>
+                <a:ea typeface="Malgun Gothic"/>
+                <a:cs typeface="Malgun Gothic"/>
+              </a:rPr>
+              <a:t>3. </a:t>
+            </a:r>
+            <a:r>
+              <a:rPr sz="1400" b="1" i="0">
+                <a:solidFill>
                   <a:srgbClr val="11202B"/>
                 </a:solidFill>
                 <a:latin typeface="Malgun Gothic"/>
@@ -7507,7 +7565,36 @@
                 <a:ea typeface="Malgun Gothic"/>
                 <a:cs typeface="Malgun Gothic"/>
               </a:rPr>
-              <a:t>: 심방과 심실 사이의 유일한 전기적 통로다. 전도 속도가 느려 약 0.1초의 지연이 생긴다. 이 지연 덕분에 심방 수축이 끝난 뒤에 심실 수축이 시작된다. 4. </a:t>
+              <a:t>: 심방과 심실 사이의 유일한 전기적 통로다. 전도 속도가 느려 약 0.1초의 지연이 생긴다. 이 지연 덕분에 심방 수축이 끝난 뒤에 심실 수축이 시작된다.</a:t>
+            </a:r>
+          </a:p>
+          <a:p>
+            <a:pPr>
+              <a:spcAft>
+                <a:spcPts val="900"/>
+              </a:spcAft>
+            </a:pPr>
+            <a:r>
+              <a:rPr sz="1400" b="1" i="0">
+                <a:solidFill>
+                  <a:srgbClr val="F2B705"/>
+                </a:solidFill>
+                <a:latin typeface="Malgun Gothic"/>
+                <a:ea typeface="Malgun Gothic"/>
+                <a:cs typeface="Malgun Gothic"/>
+              </a:rPr>
+              <a:t>•  </a:t>
+            </a:r>
+            <a:r>
+              <a:rPr sz="1400" b="0" i="0">
+                <a:solidFill>
+                  <a:srgbClr val="11202B"/>
+                </a:solidFill>
+                <a:latin typeface="Malgun Gothic"/>
+                <a:ea typeface="Malgun Gothic"/>
+                <a:cs typeface="Malgun Gothic"/>
+              </a:rPr>
+              <a:t>4. </a:t>
             </a:r>
             <a:r>
               <a:rPr sz="1400" b="1" i="0">
@@ -8886,11 +8973,40 @@
                 <a:ea typeface="Malgun Gothic"/>
                 <a:cs typeface="Malgun Gothic"/>
               </a:rPr>
-              <a:t> 이라 하며 약 120 mL다. 2. </a:t>
-            </a:r>
+              <a:t> 이라 하며 약 120 mL다.</a:t>
+            </a:r>
+          </a:p>
+          <a:p>
+            <a:pPr>
+              <a:spcAft>
+                <a:spcPts val="900"/>
+              </a:spcAft>
+            </a:pPr>
             <a:r>
               <a:rPr sz="1400" b="1" i="0">
                 <a:solidFill>
+                  <a:srgbClr val="F2B705"/>
+                </a:solidFill>
+                <a:latin typeface="Malgun Gothic"/>
+                <a:ea typeface="Malgun Gothic"/>
+                <a:cs typeface="Malgun Gothic"/>
+              </a:rPr>
+              <a:t>•  </a:t>
+            </a:r>
+            <a:r>
+              <a:rPr sz="1400" b="0" i="0">
+                <a:solidFill>
+                  <a:srgbClr val="11202B"/>
+                </a:solidFill>
+                <a:latin typeface="Malgun Gothic"/>
+                <a:ea typeface="Malgun Gothic"/>
+                <a:cs typeface="Malgun Gothic"/>
+              </a:rPr>
+              <a:t>2. </a:t>
+            </a:r>
+            <a:r>
+              <a:rPr sz="1400" b="1" i="0">
+                <a:solidFill>
                   <a:srgbClr val="11202B"/>
                 </a:solidFill>
                 <a:latin typeface="Malgun Gothic"/>
@@ -8908,11 +9024,40 @@
                 <a:ea typeface="Malgun Gothic"/>
                 <a:cs typeface="Malgun Gothic"/>
               </a:rPr>
-              <a:t>: 심실이 수축을 시작해 심실압이 심방압을 넘으면 mitral valve가 닫힌다. 그러나 아직 aorta 압력보다는 낮으므로 aortic valve도 닫혀 있다. 두 판막이 모두 닫힌 상태에서 심실이 수축하므로 용적은 변하지 않고 압력만 급격히 오른다. Mitral valve가 닫히는 소리가 제1심음(S1)이다. 3. </a:t>
-            </a:r>
+              <a:t>: 심실이 수축을 시작해 심실압이 심방압을 넘으면 mitral valve가 닫힌다. 그러나 아직 aorta 압력보다는 낮으므로 aortic valve도 닫혀 있다. 두 판막이 모두 닫힌 상태에서 심실이 수축하므로 용적은 변하지 않고 압력만 급격히 오른다. Mitral valve가 닫히는 소리가 제1심음(S1)이다.</a:t>
+            </a:r>
+          </a:p>
+          <a:p>
+            <a:pPr>
+              <a:spcAft>
+                <a:spcPts val="900"/>
+              </a:spcAft>
+            </a:pPr>
             <a:r>
               <a:rPr sz="1400" b="1" i="0">
                 <a:solidFill>
+                  <a:srgbClr val="F2B705"/>
+                </a:solidFill>
+                <a:latin typeface="Malgun Gothic"/>
+                <a:ea typeface="Malgun Gothic"/>
+                <a:cs typeface="Malgun Gothic"/>
+              </a:rPr>
+              <a:t>•  </a:t>
+            </a:r>
+            <a:r>
+              <a:rPr sz="1400" b="0" i="0">
+                <a:solidFill>
+                  <a:srgbClr val="11202B"/>
+                </a:solidFill>
+                <a:latin typeface="Malgun Gothic"/>
+                <a:ea typeface="Malgun Gothic"/>
+                <a:cs typeface="Malgun Gothic"/>
+              </a:rPr>
+              <a:t>3. </a:t>
+            </a:r>
+            <a:r>
+              <a:rPr sz="1400" b="1" i="0">
+                <a:solidFill>
                   <a:srgbClr val="11202B"/>
                 </a:solidFill>
                 <a:latin typeface="Malgun Gothic"/>
@@ -8974,7 +9119,36 @@
                 <a:ea typeface="Malgun Gothic"/>
                 <a:cs typeface="Malgun Gothic"/>
               </a:rPr>
-              <a:t> 으로 약 50 mL다. 4. </a:t>
+              <a:t> 으로 약 50 mL다.</a:t>
+            </a:r>
+          </a:p>
+          <a:p>
+            <a:pPr>
+              <a:spcAft>
+                <a:spcPts val="900"/>
+              </a:spcAft>
+            </a:pPr>
+            <a:r>
+              <a:rPr sz="1400" b="1" i="0">
+                <a:solidFill>
+                  <a:srgbClr val="F2B705"/>
+                </a:solidFill>
+                <a:latin typeface="Malgun Gothic"/>
+                <a:ea typeface="Malgun Gothic"/>
+                <a:cs typeface="Malgun Gothic"/>
+              </a:rPr>
+              <a:t>•  </a:t>
+            </a:r>
+            <a:r>
+              <a:rPr sz="1400" b="0" i="0">
+                <a:solidFill>
+                  <a:srgbClr val="11202B"/>
+                </a:solidFill>
+                <a:latin typeface="Malgun Gothic"/>
+                <a:ea typeface="Malgun Gothic"/>
+                <a:cs typeface="Malgun Gothic"/>
+              </a:rPr>
+              <a:t>4. </a:t>
             </a:r>
             <a:r>
               <a:rPr sz="1400" b="1" i="0">
@@ -14381,11 +14555,40 @@
                 <a:ea typeface="Malgun Gothic"/>
                 <a:cs typeface="Malgun Gothic"/>
               </a:rPr>
-              <a:t>: 정맥 압력이 올라가는 경우. 심부전, 정맥 폐쇄, 오래 서 있는 자세 2. </a:t>
-            </a:r>
+              <a:t>: 정맥 압력이 올라가는 경우. 심부전, 정맥 폐쇄, 오래 서 있는 자세</a:t>
+            </a:r>
+          </a:p>
+          <a:p>
+            <a:pPr>
+              <a:spcAft>
+                <a:spcPts val="900"/>
+              </a:spcAft>
+            </a:pPr>
             <a:r>
               <a:rPr sz="1400" b="1" i="0">
                 <a:solidFill>
+                  <a:srgbClr val="F2B705"/>
+                </a:solidFill>
+                <a:latin typeface="Malgun Gothic"/>
+                <a:ea typeface="Malgun Gothic"/>
+                <a:cs typeface="Malgun Gothic"/>
+              </a:rPr>
+              <a:t>•  </a:t>
+            </a:r>
+            <a:r>
+              <a:rPr sz="1400" b="0" i="0">
+                <a:solidFill>
+                  <a:srgbClr val="11202B"/>
+                </a:solidFill>
+                <a:latin typeface="Malgun Gothic"/>
+                <a:ea typeface="Malgun Gothic"/>
+                <a:cs typeface="Malgun Gothic"/>
+              </a:rPr>
+              <a:t>2. </a:t>
+            </a:r>
+            <a:r>
+              <a:rPr sz="1400" b="1" i="0">
+                <a:solidFill>
                   <a:srgbClr val="11202B"/>
                 </a:solidFill>
                 <a:latin typeface="Malgun Gothic"/>
@@ -14403,11 +14606,40 @@
                 <a:ea typeface="Malgun Gothic"/>
                 <a:cs typeface="Malgun Gothic"/>
               </a:rPr>
-              <a:t>: albumin이 부족한 경우. 간경변(합성 저하), 신증후군(소실), 심한 영양 부족 3. </a:t>
-            </a:r>
+              <a:t>: albumin이 부족한 경우. 간경변(합성 저하), 신증후군(소실), 심한 영양 부족</a:t>
+            </a:r>
+          </a:p>
+          <a:p>
+            <a:pPr>
+              <a:spcAft>
+                <a:spcPts val="900"/>
+              </a:spcAft>
+            </a:pPr>
             <a:r>
               <a:rPr sz="1400" b="1" i="0">
                 <a:solidFill>
+                  <a:srgbClr val="F2B705"/>
+                </a:solidFill>
+                <a:latin typeface="Malgun Gothic"/>
+                <a:ea typeface="Malgun Gothic"/>
+                <a:cs typeface="Malgun Gothic"/>
+              </a:rPr>
+              <a:t>•  </a:t>
+            </a:r>
+            <a:r>
+              <a:rPr sz="1400" b="0" i="0">
+                <a:solidFill>
+                  <a:srgbClr val="11202B"/>
+                </a:solidFill>
+                <a:latin typeface="Malgun Gothic"/>
+                <a:ea typeface="Malgun Gothic"/>
+                <a:cs typeface="Malgun Gothic"/>
+              </a:rPr>
+              <a:t>3. </a:t>
+            </a:r>
+            <a:r>
+              <a:rPr sz="1400" b="1" i="0">
+                <a:solidFill>
                   <a:srgbClr val="11202B"/>
                 </a:solidFill>
                 <a:latin typeface="Malgun Gothic"/>
@@ -14425,7 +14657,36 @@
                 <a:ea typeface="Malgun Gothic"/>
                 <a:cs typeface="Malgun Gothic"/>
               </a:rPr>
-              <a:t>: 단백질이 간질로 빠져나가 π_i가 올라가는 경우. 염증, 화상, 알레르기 반응 4. </a:t>
+              <a:t>: 단백질이 간질로 빠져나가 π_i가 올라가는 경우. 염증, 화상, 알레르기 반응</a:t>
+            </a:r>
+          </a:p>
+          <a:p>
+            <a:pPr>
+              <a:spcAft>
+                <a:spcPts val="900"/>
+              </a:spcAft>
+            </a:pPr>
+            <a:r>
+              <a:rPr sz="1400" b="1" i="0">
+                <a:solidFill>
+                  <a:srgbClr val="F2B705"/>
+                </a:solidFill>
+                <a:latin typeface="Malgun Gothic"/>
+                <a:ea typeface="Malgun Gothic"/>
+                <a:cs typeface="Malgun Gothic"/>
+              </a:rPr>
+              <a:t>•  </a:t>
+            </a:r>
+            <a:r>
+              <a:rPr sz="1400" b="0" i="0">
+                <a:solidFill>
+                  <a:srgbClr val="11202B"/>
+                </a:solidFill>
+                <a:latin typeface="Malgun Gothic"/>
+                <a:ea typeface="Malgun Gothic"/>
+                <a:cs typeface="Malgun Gothic"/>
+              </a:rPr>
+              <a:t>4. </a:t>
             </a:r>
             <a:r>
               <a:rPr sz="1400" b="1" i="0">
